--- a/presentation/loom-video-vender-a-contadores/Konecta-Loom-Vender-a-Contadores-Final.pptx
+++ b/presentation/loom-video-vender-a-contadores/Konecta-Loom-Vender-a-Contadores-Final.pptx
@@ -694,7 +694,7 @@
           <a:p>
             <a:r>
               <a:rPr lang="en-US" dirty="0"/>
-              <a:t>Llegamos al punto clave. Cuánto cuesta esto?</a:t>
+              <a:t>Llegamos al punto clave. ¿Cuánto cuesta esto?</a:t>
             </a:r>
             <a:endParaRPr lang="en-US" dirty="0"/>
           </a:p>
@@ -870,7 +870,7 @@
           <a:p>
             <a:r>
               <a:rPr lang="en-US" dirty="0"/>
-              <a:t>Si todo hasta aquí te cierra, la siguiente pregunta lógica es: cómo empezamos a trabajar?</a:t>
+              <a:t>Si todo hasta aquí te cierra, la siguiente pregunta lógica es: ¿cómo empezamos a trabajar?</a:t>
             </a:r>
             <a:endParaRPr lang="en-US" dirty="0"/>
           </a:p>
@@ -1046,7 +1046,7 @@
           <a:p>
             <a:r>
               <a:rPr lang="en-US" dirty="0"/>
-              <a:t>Y para cerrar: qué tienes que hacer ahora?</a:t>
+              <a:t>Y para cerrar: ¿qué tienes que hacer ahora?</a:t>
             </a:r>
             <a:endParaRPr lang="en-US" dirty="0"/>
           </a:p>
@@ -1574,7 +1574,7 @@
           <a:p>
             <a:r>
               <a:rPr lang="en-US" dirty="0"/>
-              <a:t>Antes de seguir, una pregunta clave: a quién le sirve esto?</a:t>
+              <a:t>Antes de seguir, una pregunta clave: ¿cómo saber si esto es para ti?</a:t>
             </a:r>
             <a:endParaRPr lang="en-US" dirty="0"/>
           </a:p>
@@ -1750,7 +1750,7 @@
           <a:p>
             <a:r>
               <a:rPr lang="en-US" dirty="0"/>
-              <a:t>Bien. Ahora, cómo lo hacemos?</a:t>
+              <a:t>Bien. Ahora, ¿cómo lo hacemos?</a:t>
             </a:r>
             <a:endParaRPr lang="en-US" dirty="0"/>
           </a:p>
